--- a/재정학/01_Lectures/재정학_Chapter_4.pptx
+++ b/재정학/01_Lectures/재정학_Chapter_4.pptx
@@ -5,7 +5,7 @@
     <p:sldMasterId id="2147483648" r:id="rId1"/>
   </p:sldMasterIdLst>
   <p:notesMasterIdLst>
-    <p:notesMasterId r:id="rId41"/>
+    <p:notesMasterId r:id="rId42"/>
   </p:notesMasterIdLst>
   <p:sldIdLst>
     <p:sldId id="375" r:id="rId2"/>
@@ -41,12 +41,13 @@
     <p:sldId id="624" r:id="rId32"/>
     <p:sldId id="626" r:id="rId33"/>
     <p:sldId id="627" r:id="rId34"/>
-    <p:sldId id="598" r:id="rId35"/>
-    <p:sldId id="628" r:id="rId36"/>
-    <p:sldId id="629" r:id="rId37"/>
-    <p:sldId id="630" r:id="rId38"/>
-    <p:sldId id="631" r:id="rId39"/>
-    <p:sldId id="364" r:id="rId40"/>
+    <p:sldId id="632" r:id="rId35"/>
+    <p:sldId id="598" r:id="rId36"/>
+    <p:sldId id="628" r:id="rId37"/>
+    <p:sldId id="629" r:id="rId38"/>
+    <p:sldId id="630" r:id="rId39"/>
+    <p:sldId id="631" r:id="rId40"/>
+    <p:sldId id="364" r:id="rId41"/>
   </p:sldIdLst>
   <p:sldSz cx="12192000" cy="6858000"/>
   <p:notesSz cx="6858000" cy="9144000"/>
@@ -257,7 +258,7 @@
           <a:p>
             <a:fld id="{4A5E00EF-AEA4-43E2-9451-8F9C59A39471}" type="datetimeFigureOut">
               <a:rPr lang="ko-KR" altLang="en-US" smtClean="0"/>
-              <a:t>2026-01-12</a:t>
+              <a:t>2026-03-22</a:t>
             </a:fld>
             <a:endParaRPr lang="ko-KR" altLang="en-US"/>
           </a:p>
@@ -679,7 +680,7 @@
           <a:p>
             <a:fld id="{CD32C56F-BD27-4999-9E6D-D4EACE3DA9F4}" type="datetime1">
               <a:rPr lang="ko-KR" altLang="en-US" smtClean="0"/>
-              <a:t>2026-01-12</a:t>
+              <a:t>2026-03-22</a:t>
             </a:fld>
             <a:endParaRPr lang="ko-KR" altLang="en-US"/>
           </a:p>
@@ -893,7 +894,7 @@
           <a:p>
             <a:fld id="{8EF4A19C-72C8-45CA-8E3F-68A7FA345D6C}" type="datetime1">
               <a:rPr lang="ko-KR" altLang="en-US" smtClean="0"/>
-              <a:t>2026-01-12</a:t>
+              <a:t>2026-03-22</a:t>
             </a:fld>
             <a:endParaRPr lang="ko-KR" altLang="en-US"/>
           </a:p>
@@ -1117,7 +1118,7 @@
           <a:p>
             <a:fld id="{56A175B2-010B-4341-954C-5F8F5C70B124}" type="datetime1">
               <a:rPr lang="ko-KR" altLang="en-US" smtClean="0"/>
-              <a:t>2026-01-12</a:t>
+              <a:t>2026-03-22</a:t>
             </a:fld>
             <a:endParaRPr lang="ko-KR" altLang="en-US"/>
           </a:p>
@@ -1331,7 +1332,7 @@
           <a:p>
             <a:fld id="{16B83F9E-22C9-45CA-9E85-070F1D3EF530}" type="datetime1">
               <a:rPr lang="ko-KR" altLang="en-US" smtClean="0"/>
-              <a:t>2026-01-12</a:t>
+              <a:t>2026-03-22</a:t>
             </a:fld>
             <a:endParaRPr lang="ko-KR" altLang="en-US"/>
           </a:p>
@@ -1622,7 +1623,7 @@
           <a:p>
             <a:fld id="{03278F45-FB3C-4C4D-B89A-7BC3F5F229F6}" type="datetime1">
               <a:rPr lang="ko-KR" altLang="en-US" smtClean="0"/>
-              <a:t>2026-01-12</a:t>
+              <a:t>2026-03-22</a:t>
             </a:fld>
             <a:endParaRPr lang="ko-KR" altLang="en-US"/>
           </a:p>
@@ -2015,7 +2016,7 @@
           <a:p>
             <a:fld id="{38FDAC3C-35A6-415C-9F03-738A6AC328B1}" type="datetime1">
               <a:rPr lang="ko-KR" altLang="en-US" smtClean="0"/>
-              <a:t>2026-01-12</a:t>
+              <a:t>2026-03-22</a:t>
             </a:fld>
             <a:endParaRPr lang="ko-KR" altLang="en-US"/>
           </a:p>
@@ -3609,7 +3610,7 @@
           <a:p>
             <a:fld id="{507A0DF1-AEE6-4B0D-89D2-351E7B3EF65C}" type="datetime1">
               <a:rPr lang="ko-KR" altLang="en-US" smtClean="0"/>
-              <a:t>2026-01-12</a:t>
+              <a:t>2026-03-22</a:t>
             </a:fld>
             <a:endParaRPr lang="ko-KR" altLang="en-US"/>
           </a:p>
@@ -4037,7 +4038,7 @@
           <a:p>
             <a:fld id="{CA93B8C9-630F-4D57-944D-04FD37CECCD3}" type="datetime1">
               <a:rPr lang="ko-KR" altLang="en-US" smtClean="0"/>
-              <a:t>2026-01-12</a:t>
+              <a:t>2026-03-22</a:t>
             </a:fld>
             <a:endParaRPr lang="ko-KR" altLang="en-US"/>
           </a:p>
@@ -4194,7 +4195,7 @@
           <a:p>
             <a:fld id="{E986165A-AC43-4902-9541-874ECD310BA3}" type="datetime1">
               <a:rPr lang="ko-KR" altLang="en-US" smtClean="0"/>
-              <a:t>2026-01-12</a:t>
+              <a:t>2026-03-22</a:t>
             </a:fld>
             <a:endParaRPr lang="ko-KR" altLang="en-US"/>
           </a:p>
@@ -4521,7 +4522,7 @@
           <a:p>
             <a:fld id="{47E6EE6D-2B0E-43A9-87A2-7354CDB998F4}" type="datetime1">
               <a:rPr lang="ko-KR" altLang="en-US" smtClean="0"/>
-              <a:t>2026-01-12</a:t>
+              <a:t>2026-03-22</a:t>
             </a:fld>
             <a:endParaRPr lang="ko-KR" altLang="en-US"/>
           </a:p>
@@ -4825,7 +4826,7 @@
           <a:p>
             <a:fld id="{5CC5944E-0BC8-4FAA-9F94-6B4B05834E10}" type="datetime1">
               <a:rPr lang="ko-KR" altLang="en-US" smtClean="0"/>
-              <a:t>2026-01-12</a:t>
+              <a:t>2026-03-22</a:t>
             </a:fld>
             <a:endParaRPr lang="ko-KR" altLang="en-US"/>
           </a:p>
@@ -27221,7 +27222,7 @@
         <p:spPr>
           <a:xfrm>
             <a:off x="288790" y="958844"/>
-            <a:ext cx="11693660" cy="1522020"/>
+            <a:ext cx="11693660" cy="4846007"/>
           </a:xfrm>
           <a:prstGeom prst="rect">
             <a:avLst/>
@@ -27343,6 +27344,282 @@
             <a:r>
               <a:rPr lang="ko-KR" altLang="en-US" sz="1600" spc="-100" dirty="0"/>
               <a:t>공공재와 관련해 무임승차 문제가 항상 발생하는 것은 아니라는 주장이다</a:t>
+            </a:r>
+            <a:r>
+              <a:rPr lang="en-US" altLang="ko-KR" sz="1600" spc="-100" dirty="0"/>
+              <a:t>.</a:t>
+            </a:r>
+          </a:p>
+          <a:p>
+            <a:pPr marL="377825" indent="-285750">
+              <a:lnSpc>
+                <a:spcPct val="150000"/>
+              </a:lnSpc>
+              <a:buFont typeface="Arial" panose="020B0604020202020204" pitchFamily="34" charset="0"/>
+              <a:buChar char="•"/>
+            </a:pPr>
+            <a:r>
+              <a:rPr lang="ko-KR" altLang="en-US" sz="1600" spc="-100" dirty="0"/>
+              <a:t>공공재게임이라는 실험적 상황을 통해 사람들의 행태를 관찰한 결과 무임승차 이론이 꼭 들어 맞는 것이 아님을 밝혔다</a:t>
+            </a:r>
+            <a:r>
+              <a:rPr lang="en-US" altLang="ko-KR" sz="1600" spc="-100" dirty="0"/>
+              <a:t>.</a:t>
+            </a:r>
+          </a:p>
+          <a:p>
+            <a:pPr marL="377825" indent="-285750">
+              <a:lnSpc>
+                <a:spcPct val="150000"/>
+              </a:lnSpc>
+              <a:buFont typeface="Arial" panose="020B0604020202020204" pitchFamily="34" charset="0"/>
+              <a:buChar char="•"/>
+            </a:pPr>
+            <a:r>
+              <a:rPr lang="ko-KR" altLang="en-US" sz="1600" spc="-100" dirty="0"/>
+              <a:t>전형적인 공공재 게임은 다음과 같이 진행된다</a:t>
+            </a:r>
+            <a:r>
+              <a:rPr lang="en-US" altLang="ko-KR" sz="1600" spc="-100" dirty="0"/>
+              <a:t>.</a:t>
+            </a:r>
+          </a:p>
+          <a:p>
+            <a:pPr marL="835025" lvl="1" indent="-285750">
+              <a:lnSpc>
+                <a:spcPct val="150000"/>
+              </a:lnSpc>
+              <a:buFont typeface="Wingdings" panose="05000000000000000000" pitchFamily="2" charset="2"/>
+              <a:buChar char="ü"/>
+            </a:pPr>
+            <a:r>
+              <a:rPr lang="ko-KR" altLang="en-US" sz="1600" spc="-100" dirty="0"/>
+              <a:t>실험에 참가한 사람들은 각각 </a:t>
+            </a:r>
+            <a:r>
+              <a:rPr lang="en-US" altLang="ko-KR" sz="1600" spc="-100" dirty="0"/>
+              <a:t>10</a:t>
+            </a:r>
+            <a:r>
+              <a:rPr lang="ko-KR" altLang="en-US" sz="1600" spc="-100" dirty="0"/>
+              <a:t>장의 표를 받는다</a:t>
+            </a:r>
+            <a:r>
+              <a:rPr lang="en-US" altLang="ko-KR" sz="1600" spc="-100" dirty="0"/>
+              <a:t>.</a:t>
+            </a:r>
+          </a:p>
+          <a:p>
+            <a:pPr marL="835025" lvl="1" indent="-285750">
+              <a:lnSpc>
+                <a:spcPct val="150000"/>
+              </a:lnSpc>
+              <a:buFont typeface="Wingdings" panose="05000000000000000000" pitchFamily="2" charset="2"/>
+              <a:buChar char="ü"/>
+            </a:pPr>
+            <a:r>
+              <a:rPr lang="ko-KR" altLang="en-US" sz="1600" spc="-100" dirty="0"/>
+              <a:t>이 표는 자기가 가질 수도 있고</a:t>
+            </a:r>
+            <a:r>
+              <a:rPr lang="en-US" altLang="ko-KR" sz="1600" spc="-100" dirty="0"/>
+              <a:t>, </a:t>
+            </a:r>
+            <a:r>
+              <a:rPr lang="ko-KR" altLang="en-US" sz="1600" spc="-100" dirty="0"/>
+              <a:t>공공재에 투자할 수 있다</a:t>
+            </a:r>
+            <a:r>
+              <a:rPr lang="en-US" altLang="ko-KR" sz="1600" spc="-100" dirty="0"/>
+              <a:t>. (</a:t>
+            </a:r>
+            <a:r>
+              <a:rPr lang="ko-KR" altLang="en-US" sz="1600" spc="-100" dirty="0"/>
+              <a:t>두 가지 중 하나</a:t>
+            </a:r>
+            <a:r>
+              <a:rPr lang="en-US" altLang="ko-KR" sz="1600" spc="-100" dirty="0"/>
+              <a:t>)</a:t>
+            </a:r>
+          </a:p>
+          <a:p>
+            <a:pPr marL="835025" lvl="1" indent="-285750">
+              <a:lnSpc>
+                <a:spcPct val="150000"/>
+              </a:lnSpc>
+              <a:buFont typeface="Wingdings" panose="05000000000000000000" pitchFamily="2" charset="2"/>
+              <a:buChar char="ü"/>
+            </a:pPr>
+            <a:r>
+              <a:rPr lang="ko-KR" altLang="en-US" sz="1600" spc="-100" dirty="0"/>
+              <a:t>자기가 가지면 </a:t>
+            </a:r>
+            <a:r>
+              <a:rPr lang="en-US" altLang="ko-KR" sz="1600" spc="-100" dirty="0"/>
+              <a:t>1</a:t>
+            </a:r>
+            <a:r>
+              <a:rPr lang="ko-KR" altLang="en-US" sz="1600" spc="-100" dirty="0"/>
+              <a:t>만원을 받고</a:t>
+            </a:r>
+            <a:r>
+              <a:rPr lang="en-US" altLang="ko-KR" sz="1600" spc="-100" dirty="0"/>
+              <a:t>, </a:t>
+            </a:r>
+            <a:r>
+              <a:rPr lang="ko-KR" altLang="en-US" sz="1600" spc="-100" dirty="0"/>
+              <a:t>공공재에 투자하면 실험에 참가한 모든 사람들</a:t>
+            </a:r>
+            <a:r>
+              <a:rPr lang="en-US" altLang="ko-KR" sz="1600" spc="-100" dirty="0"/>
+              <a:t>(</a:t>
+            </a:r>
+            <a:r>
+              <a:rPr lang="ko-KR" altLang="en-US" sz="1600" spc="-100" dirty="0"/>
+              <a:t>자신 포함</a:t>
+            </a:r>
+            <a:r>
+              <a:rPr lang="en-US" altLang="ko-KR" sz="1600" spc="-100" dirty="0"/>
+              <a:t>)</a:t>
+            </a:r>
+            <a:r>
+              <a:rPr lang="ko-KR" altLang="en-US" sz="1600" spc="-100" dirty="0"/>
+              <a:t>이 </a:t>
+            </a:r>
+            <a:r>
+              <a:rPr lang="en-US" altLang="ko-KR" sz="1600" spc="-100" dirty="0"/>
+              <a:t>5</a:t>
+            </a:r>
+            <a:r>
+              <a:rPr lang="ko-KR" altLang="en-US" sz="1600" spc="-100" dirty="0"/>
+              <a:t>천원씩 받는다</a:t>
+            </a:r>
+            <a:r>
+              <a:rPr lang="en-US" altLang="ko-KR" sz="1600" spc="-100" dirty="0"/>
+              <a:t>.</a:t>
+            </a:r>
+          </a:p>
+          <a:p>
+            <a:pPr marL="835025" lvl="1" indent="-285750">
+              <a:lnSpc>
+                <a:spcPct val="150000"/>
+              </a:lnSpc>
+              <a:buFont typeface="Wingdings" panose="05000000000000000000" pitchFamily="2" charset="2"/>
+              <a:buChar char="ü"/>
+            </a:pPr>
+            <a:r>
+              <a:rPr lang="ko-KR" altLang="en-US" sz="1600" spc="-100" dirty="0"/>
+              <a:t>무임승차 이론이 </a:t>
+            </a:r>
+            <a:r>
+              <a:rPr lang="ko-KR" altLang="en-US" sz="1600" spc="-100" dirty="0" err="1"/>
+              <a:t>맞다면</a:t>
+            </a:r>
+            <a:r>
+              <a:rPr lang="ko-KR" altLang="en-US" sz="1600" spc="-100" dirty="0"/>
+              <a:t> </a:t>
+            </a:r>
+            <a:r>
+              <a:rPr lang="en-US" altLang="ko-KR" sz="1600" spc="-100" dirty="0"/>
+              <a:t>,</a:t>
+            </a:r>
+            <a:r>
+              <a:rPr lang="ko-KR" altLang="en-US" sz="1600" spc="-100" dirty="0"/>
+              <a:t> 각 개인은 다른 사람이 공공재에 </a:t>
+            </a:r>
+            <a:r>
+              <a:rPr lang="ko-KR" altLang="en-US" sz="1600" spc="-100" dirty="0" err="1"/>
+              <a:t>투자해주길</a:t>
+            </a:r>
+            <a:r>
+              <a:rPr lang="ko-KR" altLang="en-US" sz="1600" spc="-100" dirty="0"/>
+              <a:t> 바라며</a:t>
+            </a:r>
+            <a:r>
+              <a:rPr lang="en-US" altLang="ko-KR" sz="1600" spc="-100" dirty="0"/>
+              <a:t>, 10</a:t>
+            </a:r>
+            <a:r>
+              <a:rPr lang="ko-KR" altLang="en-US" sz="1600" spc="-100" dirty="0"/>
+              <a:t>장의 표 전부를 자기가 가지고 있어야 한다</a:t>
+            </a:r>
+            <a:r>
+              <a:rPr lang="en-US" altLang="ko-KR" sz="1600" spc="-100" dirty="0"/>
+              <a:t>.</a:t>
+            </a:r>
+          </a:p>
+          <a:p>
+            <a:pPr marL="377825" indent="-285750">
+              <a:lnSpc>
+                <a:spcPct val="150000"/>
+              </a:lnSpc>
+              <a:buFont typeface="Arial" panose="020B0604020202020204" pitchFamily="34" charset="0"/>
+              <a:buChar char="•"/>
+            </a:pPr>
+            <a:r>
+              <a:rPr lang="ko-KR" altLang="en-US" sz="1600" spc="-100" dirty="0" err="1"/>
+              <a:t>마웰</a:t>
+            </a:r>
+            <a:r>
+              <a:rPr lang="en-US" altLang="ko-KR" sz="1600" spc="-100" dirty="0"/>
+              <a:t>-</a:t>
+            </a:r>
+            <a:r>
+              <a:rPr lang="ko-KR" altLang="en-US" sz="1600" spc="-100" dirty="0" err="1"/>
+              <a:t>에임즈는</a:t>
+            </a:r>
+            <a:r>
+              <a:rPr lang="ko-KR" altLang="en-US" sz="1600" spc="-100" dirty="0"/>
+              <a:t> 조건을 조금씩 다르게 해서 공공재게임을 여러 번 해본 결과</a:t>
+            </a:r>
+            <a:r>
+              <a:rPr lang="en-US" altLang="ko-KR" sz="1600" spc="-100" dirty="0"/>
+              <a:t>, </a:t>
+            </a:r>
+            <a:r>
+              <a:rPr lang="ko-KR" altLang="en-US" sz="1600" spc="-100" dirty="0"/>
+              <a:t>자신에게 배정된 표의 </a:t>
+            </a:r>
+            <a:r>
+              <a:rPr lang="en-US" altLang="ko-KR" sz="1600" spc="-100" dirty="0"/>
+              <a:t>40%~60% </a:t>
+            </a:r>
+            <a:r>
+              <a:rPr lang="ko-KR" altLang="en-US" sz="1600" spc="-100" dirty="0"/>
+              <a:t>정도를 공공재에 투자하는 것으로 </a:t>
+            </a:r>
+            <a:r>
+              <a:rPr lang="ko-KR" altLang="en-US" sz="1600" spc="-100" dirty="0" err="1"/>
+              <a:t>드러</a:t>
+            </a:r>
+            <a:r>
+              <a:rPr lang="ko-KR" altLang="en-US" sz="1600" spc="-100" dirty="0"/>
+              <a:t> 났다</a:t>
+            </a:r>
+            <a:r>
+              <a:rPr lang="en-US" altLang="ko-KR" sz="1600" spc="-100" dirty="0"/>
+              <a:t>.</a:t>
+            </a:r>
+          </a:p>
+          <a:p>
+            <a:pPr marL="835025" lvl="1" indent="-285750">
+              <a:lnSpc>
+                <a:spcPct val="150000"/>
+              </a:lnSpc>
+              <a:buFont typeface="Wingdings" panose="05000000000000000000" pitchFamily="2" charset="2"/>
+              <a:buChar char="ü"/>
+            </a:pPr>
+            <a:r>
+              <a:rPr lang="ko-KR" altLang="en-US" sz="1600" spc="-100" dirty="0"/>
+              <a:t>이는 사람들이 무임승차를 할 수 있는 상황에서도</a:t>
+            </a:r>
+            <a:r>
+              <a:rPr lang="en-US" altLang="ko-KR" sz="1600" spc="-100" dirty="0"/>
+              <a:t>, </a:t>
+            </a:r>
+            <a:r>
+              <a:rPr lang="ko-KR" altLang="en-US" sz="1600" spc="-100" dirty="0"/>
+              <a:t>무임승차를 자제한 것이다</a:t>
             </a:r>
             <a:r>
               <a:rPr lang="en-US" altLang="ko-KR" sz="1600" spc="-100" dirty="0"/>
@@ -27365,6 +27642,438 @@
 </file>
 
 <file path=ppt/slides/slide34.xml><?xml version="1.0" encoding="utf-8"?>
+<p:sld xmlns:a="http://schemas.openxmlformats.org/drawingml/2006/main" xmlns:r="http://schemas.openxmlformats.org/officeDocument/2006/relationships" xmlns:p="http://schemas.openxmlformats.org/presentationml/2006/main">
+  <p:cSld>
+    <p:spTree>
+      <p:nvGrpSpPr>
+        <p:cNvPr id="1" name="">
+          <a:extLst>
+            <a:ext uri="{FF2B5EF4-FFF2-40B4-BE49-F238E27FC236}">
+              <a16:creationId xmlns:a16="http://schemas.microsoft.com/office/drawing/2014/main" id="{0A0F2DC6-A6DD-3A81-789C-298E0360C2A1}"/>
+            </a:ext>
+          </a:extLst>
+        </p:cNvPr>
+        <p:cNvGrpSpPr/>
+        <p:nvPr/>
+      </p:nvGrpSpPr>
+      <p:grpSpPr>
+        <a:xfrm>
+          <a:off x="0" y="0"/>
+          <a:ext cx="0" cy="0"/>
+          <a:chOff x="0" y="0"/>
+          <a:chExt cx="0" cy="0"/>
+        </a:xfrm>
+      </p:grpSpPr>
+      <p:sp>
+        <p:nvSpPr>
+          <p:cNvPr id="2" name="제목 1">
+            <a:extLst>
+              <a:ext uri="{FF2B5EF4-FFF2-40B4-BE49-F238E27FC236}">
+                <a16:creationId xmlns:a16="http://schemas.microsoft.com/office/drawing/2014/main" id="{6DA1E4E9-0DB1-E528-F64A-7004789BB559}"/>
+              </a:ext>
+            </a:extLst>
+          </p:cNvPr>
+          <p:cNvSpPr>
+            <a:spLocks noGrp="1"/>
+          </p:cNvSpPr>
+          <p:nvPr>
+            <p:ph type="title"/>
+          </p:nvPr>
+        </p:nvSpPr>
+        <p:spPr/>
+        <p:txBody>
+          <a:bodyPr/>
+          <a:lstStyle/>
+          <a:p>
+            <a:r>
+              <a:rPr lang="ko-KR" altLang="en-US" dirty="0"/>
+              <a:t>공공재게임</a:t>
+            </a:r>
+            <a:r>
+              <a:rPr lang="en-US" altLang="ko-KR" dirty="0"/>
+              <a:t>-</a:t>
+            </a:r>
+            <a:r>
+              <a:rPr lang="ko-KR" altLang="en-US" dirty="0"/>
+              <a:t>행태경제이론적 관점</a:t>
+            </a:r>
+          </a:p>
+        </p:txBody>
+      </p:sp>
+      <p:sp>
+        <p:nvSpPr>
+          <p:cNvPr id="4" name="슬라이드 번호 개체 틀 3">
+            <a:extLst>
+              <a:ext uri="{FF2B5EF4-FFF2-40B4-BE49-F238E27FC236}">
+                <a16:creationId xmlns:a16="http://schemas.microsoft.com/office/drawing/2014/main" id="{8F1DBD68-FBD2-321B-B1B8-0609B5356E43}"/>
+              </a:ext>
+            </a:extLst>
+          </p:cNvPr>
+          <p:cNvSpPr>
+            <a:spLocks noGrp="1"/>
+          </p:cNvSpPr>
+          <p:nvPr>
+            <p:ph type="sldNum" sz="quarter" idx="12"/>
+          </p:nvPr>
+        </p:nvSpPr>
+        <p:spPr/>
+        <p:txBody>
+          <a:bodyPr/>
+          <a:lstStyle/>
+          <a:p>
+            <a:fld id="{109C872D-39A9-4065-8BF3-6A613116E2A1}" type="slidenum">
+              <a:rPr lang="ko-KR" altLang="en-US" smtClean="0"/>
+              <a:t>34</a:t>
+            </a:fld>
+            <a:endParaRPr lang="ko-KR" altLang="en-US"/>
+          </a:p>
+        </p:txBody>
+      </p:sp>
+      <p:sp>
+        <p:nvSpPr>
+          <p:cNvPr id="5" name="TextBox 4">
+            <a:extLst>
+              <a:ext uri="{FF2B5EF4-FFF2-40B4-BE49-F238E27FC236}">
+                <a16:creationId xmlns:a16="http://schemas.microsoft.com/office/drawing/2014/main" id="{BB6134A6-4DB4-918B-E5FF-7B16D94CEF53}"/>
+              </a:ext>
+            </a:extLst>
+          </p:cNvPr>
+          <p:cNvSpPr txBox="1"/>
+          <p:nvPr/>
+        </p:nvSpPr>
+        <p:spPr>
+          <a:xfrm>
+            <a:off x="288790" y="958844"/>
+            <a:ext cx="11693660" cy="5215338"/>
+          </a:xfrm>
+          <a:prstGeom prst="rect">
+            <a:avLst/>
+          </a:prstGeom>
+          <a:noFill/>
+        </p:spPr>
+        <p:txBody>
+          <a:bodyPr wrap="square" rtlCol="0" anchor="t">
+            <a:spAutoFit/>
+          </a:bodyPr>
+          <a:lstStyle/>
+          <a:p>
+            <a:pPr marL="377825" indent="-285750">
+              <a:lnSpc>
+                <a:spcPct val="150000"/>
+              </a:lnSpc>
+              <a:buFont typeface="Arial" panose="020B0604020202020204" pitchFamily="34" charset="0"/>
+              <a:buChar char="•"/>
+            </a:pPr>
+            <a:r>
+              <a:rPr lang="ko-KR" altLang="en-US" sz="1600" spc="-100" dirty="0"/>
+              <a:t>앞서 공공재 게임에서 사람들은 왜 무임승차를 하지 </a:t>
+            </a:r>
+            <a:r>
+              <a:rPr lang="ko-KR" altLang="en-US" sz="1600" spc="-100" dirty="0" err="1"/>
+              <a:t>않았을지</a:t>
+            </a:r>
+            <a:r>
+              <a:rPr lang="ko-KR" altLang="en-US" sz="1600" spc="-100" dirty="0"/>
+              <a:t> 이유를 생각해보면 다음과 같다</a:t>
+            </a:r>
+            <a:r>
+              <a:rPr lang="en-US" altLang="ko-KR" sz="1600" spc="-100" dirty="0"/>
+              <a:t>.</a:t>
+            </a:r>
+          </a:p>
+          <a:p>
+            <a:pPr marL="835025" lvl="1" indent="-285750">
+              <a:lnSpc>
+                <a:spcPct val="150000"/>
+              </a:lnSpc>
+              <a:buFont typeface="Wingdings" panose="05000000000000000000" pitchFamily="2" charset="2"/>
+              <a:buChar char="ü"/>
+            </a:pPr>
+            <a:r>
+              <a:rPr lang="ko-KR" altLang="en-US" sz="1600" spc="-100" dirty="0"/>
+              <a:t>무임승차 하는 것은 떳떳하지 못한 일이라는 인식 때문에</a:t>
+            </a:r>
+            <a:r>
+              <a:rPr lang="en-US" altLang="ko-KR" sz="1600" spc="-100" dirty="0"/>
+              <a:t>, </a:t>
+            </a:r>
+            <a:r>
+              <a:rPr lang="ko-KR" altLang="en-US" sz="1600" spc="-100" dirty="0"/>
+              <a:t>소소한 인식보다는 명예를 더 중시하는 사람인 경우</a:t>
+            </a:r>
+            <a:endParaRPr lang="en-US" altLang="ko-KR" sz="1600" spc="-100" dirty="0"/>
+          </a:p>
+          <a:p>
+            <a:pPr marL="835025" lvl="1" indent="-285750">
+              <a:lnSpc>
+                <a:spcPct val="150000"/>
+              </a:lnSpc>
+              <a:buFont typeface="Wingdings" panose="05000000000000000000" pitchFamily="2" charset="2"/>
+              <a:buChar char="ü"/>
+            </a:pPr>
+            <a:r>
+              <a:rPr lang="ko-KR" altLang="en-US" sz="1600" spc="-100" dirty="0"/>
+              <a:t>또 무임승차를 하려는 행위가 다른 사람의 분노를 사서 더 큰 불이익으로 이어질지도 모른다는 두려움이 생기는 경우</a:t>
+            </a:r>
+            <a:endParaRPr lang="en-US" altLang="ko-KR" sz="1600" spc="-100" dirty="0"/>
+          </a:p>
+          <a:p>
+            <a:pPr marL="377825" indent="-285750">
+              <a:lnSpc>
+                <a:spcPct val="150000"/>
+              </a:lnSpc>
+              <a:buFont typeface="Arial" panose="020B0604020202020204" pitchFamily="34" charset="0"/>
+              <a:buChar char="•"/>
+            </a:pPr>
+            <a:endParaRPr lang="en-US" altLang="ko-KR" sz="1600" spc="-100" dirty="0"/>
+          </a:p>
+          <a:p>
+            <a:pPr marL="377825" indent="-285750">
+              <a:lnSpc>
+                <a:spcPct val="150000"/>
+              </a:lnSpc>
+              <a:buFont typeface="Arial" panose="020B0604020202020204" pitchFamily="34" charset="0"/>
+              <a:buChar char="•"/>
+            </a:pPr>
+            <a:r>
+              <a:rPr lang="ko-KR" altLang="en-US" sz="1600" spc="-100" dirty="0"/>
+              <a:t>퍼</a:t>
+            </a:r>
+            <a:r>
+              <a:rPr lang="en-US" altLang="ko-KR" sz="1600" spc="-100" dirty="0"/>
+              <a:t>-</a:t>
+            </a:r>
+            <a:r>
+              <a:rPr lang="ko-KR" altLang="en-US" sz="1600" spc="-100" dirty="0"/>
+              <a:t>게히터는 또 다른 형태의 공공재 게임을 고안했는데</a:t>
+            </a:r>
+            <a:r>
+              <a:rPr lang="en-US" altLang="ko-KR" sz="1600" spc="-100" dirty="0"/>
+              <a:t>, </a:t>
+            </a:r>
+            <a:r>
+              <a:rPr lang="ko-KR" altLang="en-US" sz="1600" spc="-100" dirty="0"/>
+              <a:t>여러 라운드에 걸쳐 공공재 게임을 진행하며</a:t>
+            </a:r>
+            <a:r>
+              <a:rPr lang="en-US" altLang="ko-KR" sz="1600" spc="-100" dirty="0"/>
+              <a:t>, </a:t>
+            </a:r>
+            <a:r>
+              <a:rPr lang="ko-KR" altLang="en-US" sz="1600" spc="-100" dirty="0"/>
+              <a:t>각 라운드가 끝날 때마다 각자가 어떤 결정을 했는지 모두에게 공개를 한다</a:t>
+            </a:r>
+            <a:r>
+              <a:rPr lang="en-US" altLang="ko-KR" sz="1600" spc="-100" dirty="0"/>
+              <a:t>. </a:t>
+            </a:r>
+            <a:r>
+              <a:rPr lang="ko-KR" altLang="en-US" sz="1600" spc="-100" dirty="0"/>
+              <a:t>세부 규칙은 아래와 같았다</a:t>
+            </a:r>
+            <a:r>
+              <a:rPr lang="en-US" altLang="ko-KR" sz="1600" spc="-100" dirty="0"/>
+              <a:t>.</a:t>
+            </a:r>
+          </a:p>
+          <a:p>
+            <a:pPr marL="835025" lvl="1" indent="-285750">
+              <a:lnSpc>
+                <a:spcPct val="150000"/>
+              </a:lnSpc>
+              <a:buFont typeface="Wingdings" panose="05000000000000000000" pitchFamily="2" charset="2"/>
+              <a:buChar char="ü"/>
+            </a:pPr>
+            <a:r>
+              <a:rPr lang="ko-KR" altLang="en-US" sz="1600" spc="-100" dirty="0"/>
+              <a:t>또</a:t>
+            </a:r>
+            <a:r>
+              <a:rPr lang="en-US" altLang="ko-KR" sz="1600" spc="-100" dirty="0"/>
+              <a:t>, </a:t>
+            </a:r>
+            <a:r>
+              <a:rPr lang="ko-KR" altLang="en-US" sz="1600" spc="-100" dirty="0"/>
+              <a:t>어떤 사람이 무임승차를 하면</a:t>
+            </a:r>
+            <a:r>
+              <a:rPr lang="en-US" altLang="ko-KR" sz="1600" spc="-100" dirty="0"/>
+              <a:t>, </a:t>
+            </a:r>
+            <a:r>
+              <a:rPr lang="ko-KR" altLang="en-US" sz="1600" spc="-100" dirty="0"/>
+              <a:t>다른 사람들은 그에게 벌점을 주는데</a:t>
+            </a:r>
+            <a:r>
+              <a:rPr lang="en-US" altLang="ko-KR" sz="1600" spc="-100" dirty="0"/>
+              <a:t>, </a:t>
+            </a:r>
+            <a:r>
+              <a:rPr lang="ko-KR" altLang="en-US" sz="1600" spc="-100" dirty="0"/>
+              <a:t>다음 라운드에서 그는 다른 사람에게 받은 벌점만큼 돈이 줄어든다</a:t>
+            </a:r>
+            <a:r>
+              <a:rPr lang="en-US" altLang="ko-KR" sz="1600" spc="-100" dirty="0"/>
+              <a:t>.</a:t>
+            </a:r>
+          </a:p>
+          <a:p>
+            <a:pPr marL="835025" lvl="1" indent="-285750">
+              <a:lnSpc>
+                <a:spcPct val="150000"/>
+              </a:lnSpc>
+              <a:buFont typeface="Wingdings" panose="05000000000000000000" pitchFamily="2" charset="2"/>
+              <a:buChar char="ü"/>
+            </a:pPr>
+            <a:r>
+              <a:rPr lang="ko-KR" altLang="en-US" sz="1600" spc="-100" dirty="0"/>
+              <a:t>동시에 다른 사람에게 벌점을 주기 위해서는</a:t>
+            </a:r>
+            <a:r>
+              <a:rPr lang="en-US" altLang="ko-KR" sz="1600" spc="-100" dirty="0"/>
+              <a:t>, </a:t>
+            </a:r>
+            <a:r>
+              <a:rPr lang="ko-KR" altLang="en-US" sz="1600" spc="-100" dirty="0"/>
+              <a:t>벌점 주는 사람 자신도 일정 금액을 포기해야 한다</a:t>
+            </a:r>
+            <a:r>
+              <a:rPr lang="en-US" altLang="ko-KR" sz="1600" spc="-100" dirty="0"/>
+              <a:t>.</a:t>
+            </a:r>
+          </a:p>
+          <a:p>
+            <a:pPr marL="377825" indent="-285750">
+              <a:lnSpc>
+                <a:spcPct val="150000"/>
+              </a:lnSpc>
+              <a:buFont typeface="Arial" panose="020B0604020202020204" pitchFamily="34" charset="0"/>
+              <a:buChar char="•"/>
+            </a:pPr>
+            <a:r>
+              <a:rPr lang="ko-KR" altLang="en-US" sz="1600" spc="-100" dirty="0"/>
+              <a:t>이 게임에서 모든 사람이 이기적이고 합리적이라면</a:t>
+            </a:r>
+            <a:r>
+              <a:rPr lang="en-US" altLang="ko-KR" sz="1600" spc="-100" dirty="0"/>
+              <a:t>, </a:t>
+            </a:r>
+            <a:r>
+              <a:rPr lang="ko-KR" altLang="en-US" sz="1600" spc="-100" dirty="0"/>
+              <a:t>무임승차를 하는 사람에게 아무런 징벌도 가하지 않을 것이다 </a:t>
+            </a:r>
+            <a:r>
+              <a:rPr lang="en-US" altLang="ko-KR" sz="1600" spc="-100" dirty="0"/>
+              <a:t>(</a:t>
+            </a:r>
+            <a:r>
+              <a:rPr lang="ko-KR" altLang="en-US" sz="1600" spc="-100" dirty="0"/>
+              <a:t>징벌을 내리는 사람도 돈을 잃기 때문</a:t>
+            </a:r>
+            <a:r>
+              <a:rPr lang="en-US" altLang="ko-KR" sz="1600" spc="-100" dirty="0"/>
+              <a:t>). </a:t>
+            </a:r>
+            <a:r>
+              <a:rPr lang="ko-KR" altLang="en-US" sz="1600" spc="-100" dirty="0"/>
+              <a:t>따라서 </a:t>
+            </a:r>
+            <a:r>
+              <a:rPr lang="ko-KR" altLang="en-US" sz="1600" spc="-100" dirty="0" err="1"/>
+              <a:t>아까와</a:t>
+            </a:r>
+            <a:r>
+              <a:rPr lang="ko-KR" altLang="en-US" sz="1600" spc="-100" dirty="0"/>
+              <a:t> 달리 징벌제도가 있어도 실험의 결과는 아무런 차이가 없을 것으로 예측할 수 있다</a:t>
+            </a:r>
+            <a:r>
+              <a:rPr lang="en-US" altLang="ko-KR" sz="1600" spc="-100" dirty="0"/>
+              <a:t>.</a:t>
+            </a:r>
+          </a:p>
+          <a:p>
+            <a:pPr marL="835025" lvl="1" indent="-285750">
+              <a:lnSpc>
+                <a:spcPct val="150000"/>
+              </a:lnSpc>
+              <a:buFont typeface="Wingdings" panose="05000000000000000000" pitchFamily="2" charset="2"/>
+              <a:buChar char="ü"/>
+            </a:pPr>
+            <a:r>
+              <a:rPr lang="ko-KR" altLang="en-US" sz="1600" spc="-100" dirty="0"/>
+              <a:t>그러나 결과는 정반대로</a:t>
+            </a:r>
+            <a:r>
+              <a:rPr lang="en-US" altLang="ko-KR" sz="1600" spc="-100" dirty="0"/>
+              <a:t>, </a:t>
+            </a:r>
+            <a:r>
+              <a:rPr lang="ko-KR" altLang="en-US" sz="1600" spc="-100" dirty="0"/>
+              <a:t>사람들이 비용을 치르면서까지 무임승차 하는 사람에게 징벌을 가하였다</a:t>
+            </a:r>
+            <a:r>
+              <a:rPr lang="en-US" altLang="ko-KR" sz="1600" spc="-100" dirty="0"/>
+              <a:t>.</a:t>
+            </a:r>
+          </a:p>
+          <a:p>
+            <a:pPr marL="835025" lvl="1" indent="-285750">
+              <a:lnSpc>
+                <a:spcPct val="150000"/>
+              </a:lnSpc>
+              <a:buFont typeface="Wingdings" panose="05000000000000000000" pitchFamily="2" charset="2"/>
+              <a:buChar char="ü"/>
+            </a:pPr>
+            <a:r>
+              <a:rPr lang="ko-KR" altLang="en-US" sz="1600" spc="-100" dirty="0"/>
+              <a:t>이 실험 결과는 다른 사람의 분노를 살 수도 있다는 이유가 무임승차를 자제하는 큰 이유가 될 수 있음을 보여준다</a:t>
+            </a:r>
+            <a:r>
+              <a:rPr lang="en-US" altLang="ko-KR" sz="1600" spc="-100" dirty="0"/>
+              <a:t>.</a:t>
+            </a:r>
+          </a:p>
+          <a:p>
+            <a:pPr marL="377825" indent="-285750">
+              <a:lnSpc>
+                <a:spcPct val="150000"/>
+              </a:lnSpc>
+              <a:buFont typeface="Arial" panose="020B0604020202020204" pitchFamily="34" charset="0"/>
+              <a:buChar char="•"/>
+            </a:pPr>
+            <a:r>
+              <a:rPr lang="ko-KR" altLang="en-US" sz="1600" spc="-100" dirty="0"/>
+              <a:t>그러나 구성원의 숫자가 많아지면 익명성 때문에 징벌을 가하기 어렵고</a:t>
+            </a:r>
+            <a:r>
+              <a:rPr lang="en-US" altLang="ko-KR" sz="1600" spc="-100" dirty="0"/>
+              <a:t>, </a:t>
+            </a:r>
+            <a:r>
+              <a:rPr lang="ko-KR" altLang="en-US" sz="1600" spc="-100" dirty="0"/>
+              <a:t>이를 틈타 무임승차자가 많이 생길 수도 있기도 하다</a:t>
+            </a:r>
+            <a:r>
+              <a:rPr lang="en-US" altLang="ko-KR" sz="1600" spc="-100" dirty="0"/>
+              <a:t>.</a:t>
+            </a:r>
+          </a:p>
+        </p:txBody>
+      </p:sp>
+    </p:spTree>
+    <p:extLst>
+      <p:ext uri="{BB962C8B-B14F-4D97-AF65-F5344CB8AC3E}">
+        <p14:creationId xmlns:p14="http://schemas.microsoft.com/office/powerpoint/2010/main" val="3626849642"/>
+      </p:ext>
+    </p:extLst>
+  </p:cSld>
+  <p:clrMapOvr>
+    <a:masterClrMapping/>
+  </p:clrMapOvr>
+</p:sld>
+</file>
+
+<file path=ppt/slides/slide35.xml><?xml version="1.0" encoding="utf-8"?>
 <p:sld xmlns:a="http://schemas.openxmlformats.org/drawingml/2006/main" xmlns:r="http://schemas.openxmlformats.org/officeDocument/2006/relationships" xmlns:p="http://schemas.openxmlformats.org/presentationml/2006/main">
   <p:cSld>
     <p:spTree>
@@ -27447,7 +28156,7 @@
           <a:p>
             <a:fld id="{109C872D-39A9-4065-8BF3-6A613116E2A1}" type="slidenum">
               <a:rPr lang="ko-KR" altLang="en-US" smtClean="0"/>
-              <a:t>34</a:t>
+              <a:t>35</a:t>
             </a:fld>
             <a:endParaRPr lang="ko-KR" altLang="en-US"/>
           </a:p>
@@ -27507,7 +28216,7 @@
 </p:sld>
 </file>
 
-<file path=ppt/slides/slide35.xml><?xml version="1.0" encoding="utf-8"?>
+<file path=ppt/slides/slide36.xml><?xml version="1.0" encoding="utf-8"?>
 <p:sld xmlns:a="http://schemas.openxmlformats.org/drawingml/2006/main" xmlns:r="http://schemas.openxmlformats.org/officeDocument/2006/relationships" xmlns:p="http://schemas.openxmlformats.org/presentationml/2006/main">
   <p:cSld>
     <p:spTree>
@@ -27581,7 +28290,7 @@
           <a:p>
             <a:fld id="{109C872D-39A9-4065-8BF3-6A613116E2A1}" type="slidenum">
               <a:rPr lang="ko-KR" altLang="en-US" smtClean="0"/>
-              <a:t>35</a:t>
+              <a:t>36</a:t>
             </a:fld>
             <a:endParaRPr lang="ko-KR" altLang="en-US"/>
           </a:p>
@@ -27953,7 +28662,7 @@
 </p:sld>
 </file>
 
-<file path=ppt/slides/slide36.xml><?xml version="1.0" encoding="utf-8"?>
+<file path=ppt/slides/slide37.xml><?xml version="1.0" encoding="utf-8"?>
 <p:sld xmlns:a="http://schemas.openxmlformats.org/drawingml/2006/main" xmlns:r="http://schemas.openxmlformats.org/officeDocument/2006/relationships" xmlns:p="http://schemas.openxmlformats.org/presentationml/2006/main">
   <p:cSld>
     <p:spTree>
@@ -28021,7 +28730,7 @@
           <a:p>
             <a:fld id="{109C872D-39A9-4065-8BF3-6A613116E2A1}" type="slidenum">
               <a:rPr lang="ko-KR" altLang="en-US" smtClean="0"/>
-              <a:t>36</a:t>
+              <a:t>37</a:t>
             </a:fld>
             <a:endParaRPr lang="ko-KR" altLang="en-US"/>
           </a:p>
@@ -28393,7 +29102,7 @@
 </p:sld>
 </file>
 
-<file path=ppt/slides/slide37.xml><?xml version="1.0" encoding="utf-8"?>
+<file path=ppt/slides/slide38.xml><?xml version="1.0" encoding="utf-8"?>
 <p:sld xmlns:a="http://schemas.openxmlformats.org/drawingml/2006/main" xmlns:r="http://schemas.openxmlformats.org/officeDocument/2006/relationships" xmlns:p="http://schemas.openxmlformats.org/presentationml/2006/main">
   <p:cSld>
     <p:spTree>
@@ -28461,7 +29170,7 @@
           <a:p>
             <a:fld id="{109C872D-39A9-4065-8BF3-6A613116E2A1}" type="slidenum">
               <a:rPr lang="ko-KR" altLang="en-US" smtClean="0"/>
-              <a:t>37</a:t>
+              <a:t>38</a:t>
             </a:fld>
             <a:endParaRPr lang="ko-KR" altLang="en-US"/>
           </a:p>
@@ -28812,7 +29521,7 @@
 </p:sld>
 </file>
 
-<file path=ppt/slides/slide38.xml><?xml version="1.0" encoding="utf-8"?>
+<file path=ppt/slides/slide39.xml><?xml version="1.0" encoding="utf-8"?>
 <p:sld xmlns:a="http://schemas.openxmlformats.org/drawingml/2006/main" xmlns:r="http://schemas.openxmlformats.org/officeDocument/2006/relationships" xmlns:p="http://schemas.openxmlformats.org/presentationml/2006/main">
   <p:cSld>
     <p:spTree>
@@ -28880,7 +29589,7 @@
           <a:p>
             <a:fld id="{109C872D-39A9-4065-8BF3-6A613116E2A1}" type="slidenum">
               <a:rPr lang="ko-KR" altLang="en-US" smtClean="0"/>
-              <a:t>38</a:t>
+              <a:t>39</a:t>
             </a:fld>
             <a:endParaRPr lang="ko-KR" altLang="en-US"/>
           </a:p>
@@ -29114,7 +29823,410 @@
 </p:sld>
 </file>
 
-<file path=ppt/slides/slide39.xml><?xml version="1.0" encoding="utf-8"?>
+<file path=ppt/slides/slide4.xml><?xml version="1.0" encoding="utf-8"?>
+<p:sld xmlns:a="http://schemas.openxmlformats.org/drawingml/2006/main" xmlns:r="http://schemas.openxmlformats.org/officeDocument/2006/relationships" xmlns:p="http://schemas.openxmlformats.org/presentationml/2006/main">
+  <p:cSld>
+    <p:spTree>
+      <p:nvGrpSpPr>
+        <p:cNvPr id="1" name="">
+          <a:extLst>
+            <a:ext uri="{FF2B5EF4-FFF2-40B4-BE49-F238E27FC236}">
+              <a16:creationId xmlns:a16="http://schemas.microsoft.com/office/drawing/2014/main" id="{7E764ACB-B8A0-8B8E-50AE-F6949A866C73}"/>
+            </a:ext>
+          </a:extLst>
+        </p:cNvPr>
+        <p:cNvGrpSpPr/>
+        <p:nvPr/>
+      </p:nvGrpSpPr>
+      <p:grpSpPr>
+        <a:xfrm>
+          <a:off x="0" y="0"/>
+          <a:ext cx="0" cy="0"/>
+          <a:chOff x="0" y="0"/>
+          <a:chExt cx="0" cy="0"/>
+        </a:xfrm>
+      </p:grpSpPr>
+      <p:sp>
+        <p:nvSpPr>
+          <p:cNvPr id="2" name="제목 1">
+            <a:extLst>
+              <a:ext uri="{FF2B5EF4-FFF2-40B4-BE49-F238E27FC236}">
+                <a16:creationId xmlns:a16="http://schemas.microsoft.com/office/drawing/2014/main" id="{3B730496-A872-5CFB-3130-C4429F8285BC}"/>
+              </a:ext>
+            </a:extLst>
+          </p:cNvPr>
+          <p:cNvSpPr>
+            <a:spLocks noGrp="1"/>
+          </p:cNvSpPr>
+          <p:nvPr>
+            <p:ph type="title"/>
+          </p:nvPr>
+        </p:nvSpPr>
+        <p:spPr/>
+        <p:txBody>
+          <a:bodyPr/>
+          <a:lstStyle/>
+          <a:p>
+            <a:r>
+              <a:rPr lang="ko-KR" altLang="en-US" dirty="0"/>
+              <a:t>공공재의 의미</a:t>
+            </a:r>
+          </a:p>
+        </p:txBody>
+      </p:sp>
+      <p:sp>
+        <p:nvSpPr>
+          <p:cNvPr id="4" name="슬라이드 번호 개체 틀 3">
+            <a:extLst>
+              <a:ext uri="{FF2B5EF4-FFF2-40B4-BE49-F238E27FC236}">
+                <a16:creationId xmlns:a16="http://schemas.microsoft.com/office/drawing/2014/main" id="{CBD72302-C21E-82F3-1317-6A67EB8523B7}"/>
+              </a:ext>
+            </a:extLst>
+          </p:cNvPr>
+          <p:cNvSpPr>
+            <a:spLocks noGrp="1"/>
+          </p:cNvSpPr>
+          <p:nvPr>
+            <p:ph type="sldNum" sz="quarter" idx="12"/>
+          </p:nvPr>
+        </p:nvSpPr>
+        <p:spPr/>
+        <p:txBody>
+          <a:bodyPr/>
+          <a:lstStyle/>
+          <a:p>
+            <a:fld id="{109C872D-39A9-4065-8BF3-6A613116E2A1}" type="slidenum">
+              <a:rPr lang="ko-KR" altLang="en-US" smtClean="0"/>
+              <a:t>4</a:t>
+            </a:fld>
+            <a:endParaRPr lang="ko-KR" altLang="en-US"/>
+          </a:p>
+        </p:txBody>
+      </p:sp>
+      <p:sp>
+        <p:nvSpPr>
+          <p:cNvPr id="5" name="TextBox 4">
+            <a:extLst>
+              <a:ext uri="{FF2B5EF4-FFF2-40B4-BE49-F238E27FC236}">
+                <a16:creationId xmlns:a16="http://schemas.microsoft.com/office/drawing/2014/main" id="{71AEC86F-2434-0377-0126-D48FC4912B4A}"/>
+              </a:ext>
+            </a:extLst>
+          </p:cNvPr>
+          <p:cNvSpPr txBox="1"/>
+          <p:nvPr/>
+        </p:nvSpPr>
+        <p:spPr>
+          <a:xfrm>
+            <a:off x="288790" y="958844"/>
+            <a:ext cx="11693660" cy="4476675"/>
+          </a:xfrm>
+          <a:prstGeom prst="rect">
+            <a:avLst/>
+          </a:prstGeom>
+          <a:noFill/>
+        </p:spPr>
+        <p:txBody>
+          <a:bodyPr wrap="square" rtlCol="0" anchor="t">
+            <a:spAutoFit/>
+          </a:bodyPr>
+          <a:lstStyle/>
+          <a:p>
+            <a:pPr marL="377825" indent="-285750">
+              <a:lnSpc>
+                <a:spcPct val="150000"/>
+              </a:lnSpc>
+              <a:buFont typeface="Arial" panose="020B0604020202020204" pitchFamily="34" charset="0"/>
+              <a:buChar char="•"/>
+            </a:pPr>
+            <a:r>
+              <a:rPr lang="ko-KR" altLang="en-US" sz="1600" spc="-50" dirty="0"/>
+              <a:t>공공재 </a:t>
+            </a:r>
+            <a:r>
+              <a:rPr lang="en-US" altLang="ko-KR" sz="1600" spc="-50" dirty="0"/>
+              <a:t>(public goods)</a:t>
+            </a:r>
+            <a:r>
+              <a:rPr lang="ko-KR" altLang="en-US" sz="1600" spc="-50" dirty="0"/>
+              <a:t>는 보통 생각하는 재화나 서비스 </a:t>
+            </a:r>
+            <a:r>
+              <a:rPr lang="en-US" altLang="ko-KR" sz="1600" spc="-50" dirty="0"/>
+              <a:t>(</a:t>
+            </a:r>
+            <a:r>
+              <a:rPr lang="ko-KR" altLang="en-US" sz="1600" spc="-50" dirty="0"/>
+              <a:t>즉</a:t>
+            </a:r>
+            <a:r>
+              <a:rPr lang="en-US" altLang="ko-KR" sz="1600" spc="-50" dirty="0"/>
+              <a:t>, </a:t>
+            </a:r>
+            <a:r>
+              <a:rPr lang="ko-KR" altLang="en-US" sz="1600" spc="-50" dirty="0"/>
+              <a:t>사적재화 혹은 </a:t>
+            </a:r>
+            <a:r>
+              <a:rPr lang="en-US" altLang="ko-KR" sz="1600" spc="-50" dirty="0"/>
+              <a:t>private goods)</a:t>
+            </a:r>
+            <a:r>
+              <a:rPr lang="ko-KR" altLang="en-US" sz="1600" spc="-50" dirty="0"/>
+              <a:t>와 달리</a:t>
+            </a:r>
+            <a:r>
+              <a:rPr lang="en-US" altLang="ko-KR" sz="1600" spc="-50" dirty="0"/>
+              <a:t>, </a:t>
+            </a:r>
+            <a:r>
+              <a:rPr lang="ko-KR" altLang="en-US" sz="1600" spc="-50" dirty="0"/>
+              <a:t>여러 사람이 공동으로 그 소비에 참여한다는 특징을 갖는다</a:t>
+            </a:r>
+            <a:r>
+              <a:rPr lang="en-US" altLang="ko-KR" sz="1600" spc="-50" dirty="0"/>
+              <a:t>.</a:t>
+            </a:r>
+          </a:p>
+          <a:p>
+            <a:pPr marL="835025" lvl="1" indent="-285750">
+              <a:lnSpc>
+                <a:spcPct val="150000"/>
+              </a:lnSpc>
+              <a:buFont typeface="Wingdings" panose="05000000000000000000" pitchFamily="2" charset="2"/>
+              <a:buChar char="ü"/>
+            </a:pPr>
+            <a:r>
+              <a:rPr lang="ko-KR" altLang="en-US" sz="1600" spc="-50" dirty="0"/>
+              <a:t>옷</a:t>
+            </a:r>
+            <a:r>
+              <a:rPr lang="en-US" altLang="ko-KR" sz="1600" spc="-50" dirty="0"/>
+              <a:t>, </a:t>
+            </a:r>
+            <a:r>
+              <a:rPr lang="ko-KR" altLang="en-US" sz="1600" spc="-50" dirty="0"/>
+              <a:t>펜 등의 것은 개인적인 차원에서 소비가 이루어지지</a:t>
+            </a:r>
+            <a:r>
+              <a:rPr lang="en-US" altLang="ko-KR" sz="1600" spc="-50" dirty="0"/>
+              <a:t>, </a:t>
+            </a:r>
+            <a:r>
+              <a:rPr lang="ko-KR" altLang="en-US" sz="1600" spc="-50" dirty="0"/>
+              <a:t>공동으로 소비하지 않는다</a:t>
+            </a:r>
+            <a:r>
+              <a:rPr lang="en-US" altLang="ko-KR" sz="1600" spc="-50" dirty="0"/>
+              <a:t>.</a:t>
+            </a:r>
+          </a:p>
+          <a:p>
+            <a:pPr marL="835025" lvl="1" indent="-285750">
+              <a:lnSpc>
+                <a:spcPct val="150000"/>
+              </a:lnSpc>
+              <a:buFont typeface="Wingdings" panose="05000000000000000000" pitchFamily="2" charset="2"/>
+              <a:buChar char="ü"/>
+            </a:pPr>
+            <a:r>
+              <a:rPr lang="ko-KR" altLang="en-US" sz="1600" spc="-50" dirty="0"/>
+              <a:t>도로</a:t>
+            </a:r>
+            <a:r>
+              <a:rPr lang="en-US" altLang="ko-KR" sz="1600" spc="-50" dirty="0"/>
+              <a:t>, </a:t>
+            </a:r>
+            <a:r>
+              <a:rPr lang="ko-KR" altLang="en-US" sz="1600" spc="-50" dirty="0"/>
+              <a:t>공원 등의 것은 여러 사람의 공동 소비를 위해 만들어졌다는 점에서 앞서 말한 것과 큰 차이가 있다</a:t>
+            </a:r>
+            <a:r>
+              <a:rPr lang="en-US" altLang="ko-KR" sz="1600" spc="-50" dirty="0"/>
+              <a:t>.</a:t>
+            </a:r>
+          </a:p>
+          <a:p>
+            <a:pPr marL="377825" indent="-285750">
+              <a:lnSpc>
+                <a:spcPct val="150000"/>
+              </a:lnSpc>
+              <a:buFont typeface="Arial" panose="020B0604020202020204" pitchFamily="34" charset="0"/>
+              <a:buChar char="•"/>
+            </a:pPr>
+            <a:r>
+              <a:rPr lang="ko-KR" altLang="en-US" sz="1600" spc="-50" dirty="0"/>
+              <a:t>우리 책에서는 공공재를 다음과 같이 정의하고 있다</a:t>
+            </a:r>
+            <a:r>
+              <a:rPr lang="en-US" altLang="ko-KR" sz="1600" spc="-50" dirty="0"/>
+              <a:t>.</a:t>
+            </a:r>
+          </a:p>
+          <a:p>
+            <a:pPr marL="835025" lvl="1" indent="-285750">
+              <a:lnSpc>
+                <a:spcPct val="150000"/>
+              </a:lnSpc>
+              <a:buFont typeface="Wingdings" panose="05000000000000000000" pitchFamily="2" charset="2"/>
+              <a:buChar char="ü"/>
+            </a:pPr>
+            <a:r>
+              <a:rPr lang="ko-KR" altLang="en-US" sz="1600" spc="-50" dirty="0"/>
+              <a:t>한 집단의 어떤 사람을 위해</a:t>
+            </a:r>
+            <a:r>
+              <a:rPr lang="en-US" altLang="ko-KR" sz="1600" spc="-50" dirty="0"/>
+              <a:t>, </a:t>
+            </a:r>
+            <a:r>
+              <a:rPr lang="ko-KR" altLang="en-US" sz="1600" spc="-50" dirty="0"/>
+              <a:t>혹은 어떤 사람에 의해 생산되는 즉시 그 집단의 모든 구성원이 함께 소비할 수 있는 재화나 서비스를 공공재라고 부른다</a:t>
+            </a:r>
+            <a:r>
+              <a:rPr lang="en-US" altLang="ko-KR" sz="1600" spc="-50" dirty="0"/>
+              <a:t>.</a:t>
+            </a:r>
+          </a:p>
+          <a:p>
+            <a:pPr marL="377825" indent="-285750">
+              <a:lnSpc>
+                <a:spcPct val="150000"/>
+              </a:lnSpc>
+              <a:buFont typeface="Arial" panose="020B0604020202020204" pitchFamily="34" charset="0"/>
+              <a:buChar char="•"/>
+            </a:pPr>
+            <a:r>
+              <a:rPr lang="ko-KR" altLang="en-US" sz="1600" spc="-50" dirty="0"/>
+              <a:t>정부가 생산하여 공급하는 재화나 서비스 중 공공재의 성격을 갖는 것들이 많이 있는 것이 사실이다</a:t>
+            </a:r>
+            <a:r>
+              <a:rPr lang="en-US" altLang="ko-KR" sz="1600" spc="-50" dirty="0"/>
+              <a:t>. </a:t>
+            </a:r>
+            <a:r>
+              <a:rPr lang="ko-KR" altLang="en-US" sz="1600" spc="-50" dirty="0"/>
+              <a:t>하지만 공공재라는 것이 정부 혹은 공공기관에 의해 생산</a:t>
+            </a:r>
+            <a:r>
+              <a:rPr lang="en-US" altLang="ko-KR" sz="1600" spc="-50" dirty="0"/>
+              <a:t>·</a:t>
+            </a:r>
+            <a:r>
+              <a:rPr lang="ko-KR" altLang="en-US" sz="1600" spc="-50" dirty="0"/>
+              <a:t>공급되는 재화나 서비스를 뜻하는 것으로 잘못 알고 있는 경우가 많다</a:t>
+            </a:r>
+            <a:r>
+              <a:rPr lang="en-US" altLang="ko-KR" sz="1600" spc="-50" dirty="0"/>
+              <a:t>.</a:t>
+            </a:r>
+          </a:p>
+          <a:p>
+            <a:pPr marL="835025" lvl="1" indent="-285750">
+              <a:lnSpc>
+                <a:spcPct val="150000"/>
+              </a:lnSpc>
+              <a:buFont typeface="Wingdings" panose="05000000000000000000" pitchFamily="2" charset="2"/>
+              <a:buChar char="ü"/>
+            </a:pPr>
+            <a:r>
+              <a:rPr lang="ko-KR" altLang="en-US" sz="1600" spc="-50" dirty="0"/>
+              <a:t>하지만 정부는 의료서비스</a:t>
+            </a:r>
+            <a:r>
+              <a:rPr lang="en-US" altLang="ko-KR" sz="1600" spc="-50" dirty="0"/>
+              <a:t>, </a:t>
+            </a:r>
+            <a:r>
+              <a:rPr lang="ko-KR" altLang="en-US" sz="1600" spc="-50" dirty="0"/>
+              <a:t>주택서비스</a:t>
+            </a:r>
+            <a:r>
+              <a:rPr lang="en-US" altLang="ko-KR" sz="1600" spc="-50" dirty="0"/>
+              <a:t>, </a:t>
+            </a:r>
+            <a:r>
+              <a:rPr lang="ko-KR" altLang="en-US" sz="1600" spc="-50" dirty="0"/>
+              <a:t>수돗물 등과 같이 사적재화의 성격을 갖는 것들을 공급하는 경우도 있다</a:t>
+            </a:r>
+            <a:r>
+              <a:rPr lang="en-US" altLang="ko-KR" sz="1600" spc="-50" dirty="0"/>
+              <a:t>.</a:t>
+            </a:r>
+          </a:p>
+          <a:p>
+            <a:pPr marL="835025" lvl="1" indent="-285750">
+              <a:lnSpc>
+                <a:spcPct val="150000"/>
+              </a:lnSpc>
+              <a:buFont typeface="Wingdings" panose="05000000000000000000" pitchFamily="2" charset="2"/>
+              <a:buChar char="ü"/>
+            </a:pPr>
+            <a:r>
+              <a:rPr lang="ko-KR" altLang="en-US" sz="1600" spc="-50" dirty="0"/>
+              <a:t>반대로 민간단체가 공원</a:t>
+            </a:r>
+            <a:r>
+              <a:rPr lang="en-US" altLang="ko-KR" sz="1600" spc="-50" dirty="0"/>
+              <a:t>, </a:t>
+            </a:r>
+            <a:r>
+              <a:rPr lang="ko-KR" altLang="en-US" sz="1600" spc="-50" dirty="0"/>
+              <a:t>박물관 등 공공재의 성격을 갖는 것들을 공급하는 경우도 있다</a:t>
+            </a:r>
+            <a:r>
+              <a:rPr lang="en-US" altLang="ko-KR" sz="1600" spc="-50" dirty="0"/>
+              <a:t>.</a:t>
+            </a:r>
+          </a:p>
+          <a:p>
+            <a:pPr marL="835025" lvl="1" indent="-285750">
+              <a:lnSpc>
+                <a:spcPct val="150000"/>
+              </a:lnSpc>
+              <a:buFont typeface="Wingdings" panose="05000000000000000000" pitchFamily="2" charset="2"/>
+              <a:buChar char="ü"/>
+            </a:pPr>
+            <a:r>
+              <a:rPr lang="ko-KR" altLang="en-US" sz="1600" spc="-50" dirty="0"/>
+              <a:t>즉 공공재는 그 자체의 성격에 의해 규정되며</a:t>
+            </a:r>
+            <a:r>
+              <a:rPr lang="en-US" altLang="ko-KR" sz="1600" spc="-50" dirty="0"/>
+              <a:t>, </a:t>
+            </a:r>
+            <a:r>
+              <a:rPr lang="ko-KR" altLang="en-US" sz="1600" spc="-50" dirty="0"/>
+              <a:t>공급 주체가 </a:t>
+            </a:r>
+            <a:r>
+              <a:rPr lang="ko-KR" altLang="en-US" sz="1600" spc="-50" dirty="0" err="1"/>
+              <a:t>누구냐에</a:t>
+            </a:r>
+            <a:r>
+              <a:rPr lang="ko-KR" altLang="en-US" sz="1600" spc="-50" dirty="0"/>
+              <a:t> 따라 규정되는 것이 아니다</a:t>
+            </a:r>
+            <a:r>
+              <a:rPr lang="en-US" altLang="ko-KR" sz="1600" spc="-50" dirty="0"/>
+              <a:t>.</a:t>
+            </a:r>
+          </a:p>
+        </p:txBody>
+      </p:sp>
+    </p:spTree>
+    <p:extLst>
+      <p:ext uri="{BB962C8B-B14F-4D97-AF65-F5344CB8AC3E}">
+        <p14:creationId xmlns:p14="http://schemas.microsoft.com/office/powerpoint/2010/main" val="3608071698"/>
+      </p:ext>
+    </p:extLst>
+  </p:cSld>
+  <p:clrMapOvr>
+    <a:masterClrMapping/>
+  </p:clrMapOvr>
+</p:sld>
+</file>
+
+<file path=ppt/slides/slide40.xml><?xml version="1.0" encoding="utf-8"?>
 <p:sld xmlns:a="http://schemas.openxmlformats.org/drawingml/2006/main" xmlns:r="http://schemas.openxmlformats.org/officeDocument/2006/relationships" xmlns:p="http://schemas.openxmlformats.org/presentationml/2006/main">
   <p:cSld>
     <p:spTree>
@@ -29242,7 +30354,7 @@
           <a:p>
             <a:fld id="{109C872D-39A9-4065-8BF3-6A613116E2A1}" type="slidenum">
               <a:rPr lang="ko-KR" altLang="en-US" smtClean="0"/>
-              <a:t>39</a:t>
+              <a:t>40</a:t>
             </a:fld>
             <a:endParaRPr lang="ko-KR" altLang="en-US"/>
           </a:p>
@@ -29252,409 +30364,6 @@
     <p:extLst>
       <p:ext uri="{BB962C8B-B14F-4D97-AF65-F5344CB8AC3E}">
         <p14:creationId xmlns:p14="http://schemas.microsoft.com/office/powerpoint/2010/main" val="3130404870"/>
-      </p:ext>
-    </p:extLst>
-  </p:cSld>
-  <p:clrMapOvr>
-    <a:masterClrMapping/>
-  </p:clrMapOvr>
-</p:sld>
-</file>
-
-<file path=ppt/slides/slide4.xml><?xml version="1.0" encoding="utf-8"?>
-<p:sld xmlns:a="http://schemas.openxmlformats.org/drawingml/2006/main" xmlns:r="http://schemas.openxmlformats.org/officeDocument/2006/relationships" xmlns:p="http://schemas.openxmlformats.org/presentationml/2006/main">
-  <p:cSld>
-    <p:spTree>
-      <p:nvGrpSpPr>
-        <p:cNvPr id="1" name="">
-          <a:extLst>
-            <a:ext uri="{FF2B5EF4-FFF2-40B4-BE49-F238E27FC236}">
-              <a16:creationId xmlns:a16="http://schemas.microsoft.com/office/drawing/2014/main" id="{7E764ACB-B8A0-8B8E-50AE-F6949A866C73}"/>
-            </a:ext>
-          </a:extLst>
-        </p:cNvPr>
-        <p:cNvGrpSpPr/>
-        <p:nvPr/>
-      </p:nvGrpSpPr>
-      <p:grpSpPr>
-        <a:xfrm>
-          <a:off x="0" y="0"/>
-          <a:ext cx="0" cy="0"/>
-          <a:chOff x="0" y="0"/>
-          <a:chExt cx="0" cy="0"/>
-        </a:xfrm>
-      </p:grpSpPr>
-      <p:sp>
-        <p:nvSpPr>
-          <p:cNvPr id="2" name="제목 1">
-            <a:extLst>
-              <a:ext uri="{FF2B5EF4-FFF2-40B4-BE49-F238E27FC236}">
-                <a16:creationId xmlns:a16="http://schemas.microsoft.com/office/drawing/2014/main" id="{3B730496-A872-5CFB-3130-C4429F8285BC}"/>
-              </a:ext>
-            </a:extLst>
-          </p:cNvPr>
-          <p:cNvSpPr>
-            <a:spLocks noGrp="1"/>
-          </p:cNvSpPr>
-          <p:nvPr>
-            <p:ph type="title"/>
-          </p:nvPr>
-        </p:nvSpPr>
-        <p:spPr/>
-        <p:txBody>
-          <a:bodyPr/>
-          <a:lstStyle/>
-          <a:p>
-            <a:r>
-              <a:rPr lang="ko-KR" altLang="en-US" dirty="0"/>
-              <a:t>공공재의 의미</a:t>
-            </a:r>
-          </a:p>
-        </p:txBody>
-      </p:sp>
-      <p:sp>
-        <p:nvSpPr>
-          <p:cNvPr id="4" name="슬라이드 번호 개체 틀 3">
-            <a:extLst>
-              <a:ext uri="{FF2B5EF4-FFF2-40B4-BE49-F238E27FC236}">
-                <a16:creationId xmlns:a16="http://schemas.microsoft.com/office/drawing/2014/main" id="{CBD72302-C21E-82F3-1317-6A67EB8523B7}"/>
-              </a:ext>
-            </a:extLst>
-          </p:cNvPr>
-          <p:cNvSpPr>
-            <a:spLocks noGrp="1"/>
-          </p:cNvSpPr>
-          <p:nvPr>
-            <p:ph type="sldNum" sz="quarter" idx="12"/>
-          </p:nvPr>
-        </p:nvSpPr>
-        <p:spPr/>
-        <p:txBody>
-          <a:bodyPr/>
-          <a:lstStyle/>
-          <a:p>
-            <a:fld id="{109C872D-39A9-4065-8BF3-6A613116E2A1}" type="slidenum">
-              <a:rPr lang="ko-KR" altLang="en-US" smtClean="0"/>
-              <a:t>4</a:t>
-            </a:fld>
-            <a:endParaRPr lang="ko-KR" altLang="en-US"/>
-          </a:p>
-        </p:txBody>
-      </p:sp>
-      <p:sp>
-        <p:nvSpPr>
-          <p:cNvPr id="5" name="TextBox 4">
-            <a:extLst>
-              <a:ext uri="{FF2B5EF4-FFF2-40B4-BE49-F238E27FC236}">
-                <a16:creationId xmlns:a16="http://schemas.microsoft.com/office/drawing/2014/main" id="{71AEC86F-2434-0377-0126-D48FC4912B4A}"/>
-              </a:ext>
-            </a:extLst>
-          </p:cNvPr>
-          <p:cNvSpPr txBox="1"/>
-          <p:nvPr/>
-        </p:nvSpPr>
-        <p:spPr>
-          <a:xfrm>
-            <a:off x="288790" y="958844"/>
-            <a:ext cx="11693660" cy="4476675"/>
-          </a:xfrm>
-          <a:prstGeom prst="rect">
-            <a:avLst/>
-          </a:prstGeom>
-          <a:noFill/>
-        </p:spPr>
-        <p:txBody>
-          <a:bodyPr wrap="square" rtlCol="0" anchor="t">
-            <a:spAutoFit/>
-          </a:bodyPr>
-          <a:lstStyle/>
-          <a:p>
-            <a:pPr marL="377825" indent="-285750">
-              <a:lnSpc>
-                <a:spcPct val="150000"/>
-              </a:lnSpc>
-              <a:buFont typeface="Arial" panose="020B0604020202020204" pitchFamily="34" charset="0"/>
-              <a:buChar char="•"/>
-            </a:pPr>
-            <a:r>
-              <a:rPr lang="ko-KR" altLang="en-US" sz="1600" spc="-50" dirty="0"/>
-              <a:t>공공재 </a:t>
-            </a:r>
-            <a:r>
-              <a:rPr lang="en-US" altLang="ko-KR" sz="1600" spc="-50" dirty="0"/>
-              <a:t>(public goods)</a:t>
-            </a:r>
-            <a:r>
-              <a:rPr lang="ko-KR" altLang="en-US" sz="1600" spc="-50" dirty="0"/>
-              <a:t>는 보통 생각하는 재화나 서비스 </a:t>
-            </a:r>
-            <a:r>
-              <a:rPr lang="en-US" altLang="ko-KR" sz="1600" spc="-50" dirty="0"/>
-              <a:t>(</a:t>
-            </a:r>
-            <a:r>
-              <a:rPr lang="ko-KR" altLang="en-US" sz="1600" spc="-50" dirty="0"/>
-              <a:t>즉</a:t>
-            </a:r>
-            <a:r>
-              <a:rPr lang="en-US" altLang="ko-KR" sz="1600" spc="-50" dirty="0"/>
-              <a:t>, </a:t>
-            </a:r>
-            <a:r>
-              <a:rPr lang="ko-KR" altLang="en-US" sz="1600" spc="-50" dirty="0"/>
-              <a:t>사적재화 혹은 </a:t>
-            </a:r>
-            <a:r>
-              <a:rPr lang="en-US" altLang="ko-KR" sz="1600" spc="-50" dirty="0"/>
-              <a:t>private goods)</a:t>
-            </a:r>
-            <a:r>
-              <a:rPr lang="ko-KR" altLang="en-US" sz="1600" spc="-50" dirty="0"/>
-              <a:t>와 달리</a:t>
-            </a:r>
-            <a:r>
-              <a:rPr lang="en-US" altLang="ko-KR" sz="1600" spc="-50" dirty="0"/>
-              <a:t>, </a:t>
-            </a:r>
-            <a:r>
-              <a:rPr lang="ko-KR" altLang="en-US" sz="1600" spc="-50" dirty="0"/>
-              <a:t>여러 사람이 공동으로 그 소비에 참여한다는 특징을 갖는다</a:t>
-            </a:r>
-            <a:r>
-              <a:rPr lang="en-US" altLang="ko-KR" sz="1600" spc="-50" dirty="0"/>
-              <a:t>.</a:t>
-            </a:r>
-          </a:p>
-          <a:p>
-            <a:pPr marL="835025" lvl="1" indent="-285750">
-              <a:lnSpc>
-                <a:spcPct val="150000"/>
-              </a:lnSpc>
-              <a:buFont typeface="Wingdings" panose="05000000000000000000" pitchFamily="2" charset="2"/>
-              <a:buChar char="ü"/>
-            </a:pPr>
-            <a:r>
-              <a:rPr lang="ko-KR" altLang="en-US" sz="1600" spc="-50" dirty="0"/>
-              <a:t>옷</a:t>
-            </a:r>
-            <a:r>
-              <a:rPr lang="en-US" altLang="ko-KR" sz="1600" spc="-50" dirty="0"/>
-              <a:t>, </a:t>
-            </a:r>
-            <a:r>
-              <a:rPr lang="ko-KR" altLang="en-US" sz="1600" spc="-50" dirty="0"/>
-              <a:t>펜 등의 것은 개인적인 차원에서 소비가 이루어지지</a:t>
-            </a:r>
-            <a:r>
-              <a:rPr lang="en-US" altLang="ko-KR" sz="1600" spc="-50" dirty="0"/>
-              <a:t>, </a:t>
-            </a:r>
-            <a:r>
-              <a:rPr lang="ko-KR" altLang="en-US" sz="1600" spc="-50" dirty="0"/>
-              <a:t>공동으로 소비하지 않는다</a:t>
-            </a:r>
-            <a:r>
-              <a:rPr lang="en-US" altLang="ko-KR" sz="1600" spc="-50" dirty="0"/>
-              <a:t>.</a:t>
-            </a:r>
-          </a:p>
-          <a:p>
-            <a:pPr marL="835025" lvl="1" indent="-285750">
-              <a:lnSpc>
-                <a:spcPct val="150000"/>
-              </a:lnSpc>
-              <a:buFont typeface="Wingdings" panose="05000000000000000000" pitchFamily="2" charset="2"/>
-              <a:buChar char="ü"/>
-            </a:pPr>
-            <a:r>
-              <a:rPr lang="ko-KR" altLang="en-US" sz="1600" spc="-50" dirty="0"/>
-              <a:t>도로</a:t>
-            </a:r>
-            <a:r>
-              <a:rPr lang="en-US" altLang="ko-KR" sz="1600" spc="-50" dirty="0"/>
-              <a:t>, </a:t>
-            </a:r>
-            <a:r>
-              <a:rPr lang="ko-KR" altLang="en-US" sz="1600" spc="-50" dirty="0"/>
-              <a:t>공원 등의 것은 여러 사람의 공동 소비를 위해 만들어졌다는 점에서 앞서 말한 것과 큰 차이가 있다</a:t>
-            </a:r>
-            <a:r>
-              <a:rPr lang="en-US" altLang="ko-KR" sz="1600" spc="-50" dirty="0"/>
-              <a:t>.</a:t>
-            </a:r>
-          </a:p>
-          <a:p>
-            <a:pPr marL="377825" indent="-285750">
-              <a:lnSpc>
-                <a:spcPct val="150000"/>
-              </a:lnSpc>
-              <a:buFont typeface="Arial" panose="020B0604020202020204" pitchFamily="34" charset="0"/>
-              <a:buChar char="•"/>
-            </a:pPr>
-            <a:r>
-              <a:rPr lang="ko-KR" altLang="en-US" sz="1600" spc="-50" dirty="0"/>
-              <a:t>우리 책에서는 공공재를 다음과 같이 정의하고 있다</a:t>
-            </a:r>
-            <a:r>
-              <a:rPr lang="en-US" altLang="ko-KR" sz="1600" spc="-50" dirty="0"/>
-              <a:t>.</a:t>
-            </a:r>
-          </a:p>
-          <a:p>
-            <a:pPr marL="835025" lvl="1" indent="-285750">
-              <a:lnSpc>
-                <a:spcPct val="150000"/>
-              </a:lnSpc>
-              <a:buFont typeface="Wingdings" panose="05000000000000000000" pitchFamily="2" charset="2"/>
-              <a:buChar char="ü"/>
-            </a:pPr>
-            <a:r>
-              <a:rPr lang="ko-KR" altLang="en-US" sz="1600" spc="-50" dirty="0"/>
-              <a:t>한 집단의 어떤 사람을 위해</a:t>
-            </a:r>
-            <a:r>
-              <a:rPr lang="en-US" altLang="ko-KR" sz="1600" spc="-50" dirty="0"/>
-              <a:t>, </a:t>
-            </a:r>
-            <a:r>
-              <a:rPr lang="ko-KR" altLang="en-US" sz="1600" spc="-50" dirty="0"/>
-              <a:t>혹은 어떤 사람에 의해 생산되는 즉시 그 집단의 모든 구성원이 함께 소비할 수 있는 재화나 서비스를 공공재라고 부른다</a:t>
-            </a:r>
-            <a:r>
-              <a:rPr lang="en-US" altLang="ko-KR" sz="1600" spc="-50" dirty="0"/>
-              <a:t>.</a:t>
-            </a:r>
-          </a:p>
-          <a:p>
-            <a:pPr marL="377825" indent="-285750">
-              <a:lnSpc>
-                <a:spcPct val="150000"/>
-              </a:lnSpc>
-              <a:buFont typeface="Arial" panose="020B0604020202020204" pitchFamily="34" charset="0"/>
-              <a:buChar char="•"/>
-            </a:pPr>
-            <a:r>
-              <a:rPr lang="ko-KR" altLang="en-US" sz="1600" spc="-50" dirty="0"/>
-              <a:t>정부가 생산하여 공급하는 재화나 서비스 중 공공재의 성격을 갖는 것들이 많이 있는 것이 사실이다</a:t>
-            </a:r>
-            <a:r>
-              <a:rPr lang="en-US" altLang="ko-KR" sz="1600" spc="-50" dirty="0"/>
-              <a:t>. </a:t>
-            </a:r>
-            <a:r>
-              <a:rPr lang="ko-KR" altLang="en-US" sz="1600" spc="-50" dirty="0"/>
-              <a:t>하지만 공공재라는 것이 정부 혹은 공공기관에 의해 생산</a:t>
-            </a:r>
-            <a:r>
-              <a:rPr lang="en-US" altLang="ko-KR" sz="1600" spc="-50" dirty="0"/>
-              <a:t>·</a:t>
-            </a:r>
-            <a:r>
-              <a:rPr lang="ko-KR" altLang="en-US" sz="1600" spc="-50" dirty="0"/>
-              <a:t>공급되는 재화나 서비스를 뜻하는 것으로 잘못 알고 있는 경우가 많다</a:t>
-            </a:r>
-            <a:r>
-              <a:rPr lang="en-US" altLang="ko-KR" sz="1600" spc="-50" dirty="0"/>
-              <a:t>.</a:t>
-            </a:r>
-          </a:p>
-          <a:p>
-            <a:pPr marL="835025" lvl="1" indent="-285750">
-              <a:lnSpc>
-                <a:spcPct val="150000"/>
-              </a:lnSpc>
-              <a:buFont typeface="Wingdings" panose="05000000000000000000" pitchFamily="2" charset="2"/>
-              <a:buChar char="ü"/>
-            </a:pPr>
-            <a:r>
-              <a:rPr lang="ko-KR" altLang="en-US" sz="1600" spc="-50" dirty="0"/>
-              <a:t>하지만 정부는 의료서비스</a:t>
-            </a:r>
-            <a:r>
-              <a:rPr lang="en-US" altLang="ko-KR" sz="1600" spc="-50" dirty="0"/>
-              <a:t>, </a:t>
-            </a:r>
-            <a:r>
-              <a:rPr lang="ko-KR" altLang="en-US" sz="1600" spc="-50" dirty="0"/>
-              <a:t>주택서비스</a:t>
-            </a:r>
-            <a:r>
-              <a:rPr lang="en-US" altLang="ko-KR" sz="1600" spc="-50" dirty="0"/>
-              <a:t>, </a:t>
-            </a:r>
-            <a:r>
-              <a:rPr lang="ko-KR" altLang="en-US" sz="1600" spc="-50" dirty="0"/>
-              <a:t>수돗물 등과 같이 사적재화의 성격을 갖는 것들을 공급하는 경우도 있다</a:t>
-            </a:r>
-            <a:r>
-              <a:rPr lang="en-US" altLang="ko-KR" sz="1600" spc="-50" dirty="0"/>
-              <a:t>.</a:t>
-            </a:r>
-          </a:p>
-          <a:p>
-            <a:pPr marL="835025" lvl="1" indent="-285750">
-              <a:lnSpc>
-                <a:spcPct val="150000"/>
-              </a:lnSpc>
-              <a:buFont typeface="Wingdings" panose="05000000000000000000" pitchFamily="2" charset="2"/>
-              <a:buChar char="ü"/>
-            </a:pPr>
-            <a:r>
-              <a:rPr lang="ko-KR" altLang="en-US" sz="1600" spc="-50" dirty="0"/>
-              <a:t>반대로 민간단체가 공원</a:t>
-            </a:r>
-            <a:r>
-              <a:rPr lang="en-US" altLang="ko-KR" sz="1600" spc="-50" dirty="0"/>
-              <a:t>, </a:t>
-            </a:r>
-            <a:r>
-              <a:rPr lang="ko-KR" altLang="en-US" sz="1600" spc="-50" dirty="0"/>
-              <a:t>박물관 등 공공재의 성격을 갖는 것들을 공급하는 경우도 있다</a:t>
-            </a:r>
-            <a:r>
-              <a:rPr lang="en-US" altLang="ko-KR" sz="1600" spc="-50" dirty="0"/>
-              <a:t>.</a:t>
-            </a:r>
-          </a:p>
-          <a:p>
-            <a:pPr marL="835025" lvl="1" indent="-285750">
-              <a:lnSpc>
-                <a:spcPct val="150000"/>
-              </a:lnSpc>
-              <a:buFont typeface="Wingdings" panose="05000000000000000000" pitchFamily="2" charset="2"/>
-              <a:buChar char="ü"/>
-            </a:pPr>
-            <a:r>
-              <a:rPr lang="ko-KR" altLang="en-US" sz="1600" spc="-50" dirty="0"/>
-              <a:t>즉 공공재는 그 자체의 성격에 의해 규정되며</a:t>
-            </a:r>
-            <a:r>
-              <a:rPr lang="en-US" altLang="ko-KR" sz="1600" spc="-50" dirty="0"/>
-              <a:t>, </a:t>
-            </a:r>
-            <a:r>
-              <a:rPr lang="ko-KR" altLang="en-US" sz="1600" spc="-50" dirty="0"/>
-              <a:t>공급 주체가 </a:t>
-            </a:r>
-            <a:r>
-              <a:rPr lang="ko-KR" altLang="en-US" sz="1600" spc="-50" dirty="0" err="1"/>
-              <a:t>누구냐에</a:t>
-            </a:r>
-            <a:r>
-              <a:rPr lang="ko-KR" altLang="en-US" sz="1600" spc="-50" dirty="0"/>
-              <a:t> 따라 규정되는 것이 아니다</a:t>
-            </a:r>
-            <a:r>
-              <a:rPr lang="en-US" altLang="ko-KR" sz="1600" spc="-50" dirty="0"/>
-              <a:t>.</a:t>
-            </a:r>
-          </a:p>
-        </p:txBody>
-      </p:sp>
-    </p:spTree>
-    <p:extLst>
-      <p:ext uri="{BB962C8B-B14F-4D97-AF65-F5344CB8AC3E}">
-        <p14:creationId xmlns:p14="http://schemas.microsoft.com/office/powerpoint/2010/main" val="3608071698"/>
       </p:ext>
     </p:extLst>
   </p:cSld>

--- a/재정학/01_Lectures/재정학_Chapter_4.pptx
+++ b/재정학/01_Lectures/재정학_Chapter_4.pptx
@@ -258,7 +258,7 @@
           <a:p>
             <a:fld id="{4A5E00EF-AEA4-43E2-9451-8F9C59A39471}" type="datetimeFigureOut">
               <a:rPr lang="ko-KR" altLang="en-US" smtClean="0"/>
-              <a:t>2026-03-22</a:t>
+              <a:t>2026-04-06</a:t>
             </a:fld>
             <a:endParaRPr lang="ko-KR" altLang="en-US"/>
           </a:p>
@@ -680,7 +680,7 @@
           <a:p>
             <a:fld id="{CD32C56F-BD27-4999-9E6D-D4EACE3DA9F4}" type="datetime1">
               <a:rPr lang="ko-KR" altLang="en-US" smtClean="0"/>
-              <a:t>2026-03-22</a:t>
+              <a:t>2026-04-06</a:t>
             </a:fld>
             <a:endParaRPr lang="ko-KR" altLang="en-US"/>
           </a:p>
@@ -894,7 +894,7 @@
           <a:p>
             <a:fld id="{8EF4A19C-72C8-45CA-8E3F-68A7FA345D6C}" type="datetime1">
               <a:rPr lang="ko-KR" altLang="en-US" smtClean="0"/>
-              <a:t>2026-03-22</a:t>
+              <a:t>2026-04-06</a:t>
             </a:fld>
             <a:endParaRPr lang="ko-KR" altLang="en-US"/>
           </a:p>
@@ -1118,7 +1118,7 @@
           <a:p>
             <a:fld id="{56A175B2-010B-4341-954C-5F8F5C70B124}" type="datetime1">
               <a:rPr lang="ko-KR" altLang="en-US" smtClean="0"/>
-              <a:t>2026-03-22</a:t>
+              <a:t>2026-04-06</a:t>
             </a:fld>
             <a:endParaRPr lang="ko-KR" altLang="en-US"/>
           </a:p>
@@ -1332,7 +1332,7 @@
           <a:p>
             <a:fld id="{16B83F9E-22C9-45CA-9E85-070F1D3EF530}" type="datetime1">
               <a:rPr lang="ko-KR" altLang="en-US" smtClean="0"/>
-              <a:t>2026-03-22</a:t>
+              <a:t>2026-04-06</a:t>
             </a:fld>
             <a:endParaRPr lang="ko-KR" altLang="en-US"/>
           </a:p>
@@ -1623,7 +1623,7 @@
           <a:p>
             <a:fld id="{03278F45-FB3C-4C4D-B89A-7BC3F5F229F6}" type="datetime1">
               <a:rPr lang="ko-KR" altLang="en-US" smtClean="0"/>
-              <a:t>2026-03-22</a:t>
+              <a:t>2026-04-06</a:t>
             </a:fld>
             <a:endParaRPr lang="ko-KR" altLang="en-US"/>
           </a:p>
@@ -2016,7 +2016,7 @@
           <a:p>
             <a:fld id="{38FDAC3C-35A6-415C-9F03-738A6AC328B1}" type="datetime1">
               <a:rPr lang="ko-KR" altLang="en-US" smtClean="0"/>
-              <a:t>2026-03-22</a:t>
+              <a:t>2026-04-06</a:t>
             </a:fld>
             <a:endParaRPr lang="ko-KR" altLang="en-US"/>
           </a:p>
@@ -3610,7 +3610,7 @@
           <a:p>
             <a:fld id="{507A0DF1-AEE6-4B0D-89D2-351E7B3EF65C}" type="datetime1">
               <a:rPr lang="ko-KR" altLang="en-US" smtClean="0"/>
-              <a:t>2026-03-22</a:t>
+              <a:t>2026-04-06</a:t>
             </a:fld>
             <a:endParaRPr lang="ko-KR" altLang="en-US"/>
           </a:p>
@@ -4038,7 +4038,7 @@
           <a:p>
             <a:fld id="{CA93B8C9-630F-4D57-944D-04FD37CECCD3}" type="datetime1">
               <a:rPr lang="ko-KR" altLang="en-US" smtClean="0"/>
-              <a:t>2026-03-22</a:t>
+              <a:t>2026-04-06</a:t>
             </a:fld>
             <a:endParaRPr lang="ko-KR" altLang="en-US"/>
           </a:p>
@@ -4195,7 +4195,7 @@
           <a:p>
             <a:fld id="{E986165A-AC43-4902-9541-874ECD310BA3}" type="datetime1">
               <a:rPr lang="ko-KR" altLang="en-US" smtClean="0"/>
-              <a:t>2026-03-22</a:t>
+              <a:t>2026-04-06</a:t>
             </a:fld>
             <a:endParaRPr lang="ko-KR" altLang="en-US"/>
           </a:p>
@@ -4522,7 +4522,7 @@
           <a:p>
             <a:fld id="{47E6EE6D-2B0E-43A9-87A2-7354CDB998F4}" type="datetime1">
               <a:rPr lang="ko-KR" altLang="en-US" smtClean="0"/>
-              <a:t>2026-03-22</a:t>
+              <a:t>2026-04-06</a:t>
             </a:fld>
             <a:endParaRPr lang="ko-KR" altLang="en-US"/>
           </a:p>
@@ -4826,7 +4826,7 @@
           <a:p>
             <a:fld id="{5CC5944E-0BC8-4FAA-9F94-6B4B05834E10}" type="datetime1">
               <a:rPr lang="ko-KR" altLang="en-US" smtClean="0"/>
-              <a:t>2026-03-22</a:t>
+              <a:t>2026-04-06</a:t>
             </a:fld>
             <a:endParaRPr lang="ko-KR" altLang="en-US"/>
           </a:p>
@@ -16840,8 +16840,8 @@
           </a:p>
         </p:txBody>
       </p:sp>
-      <mc:AlternateContent xmlns:mc="http://schemas.openxmlformats.org/markup-compatibility/2006" xmlns:a14="http://schemas.microsoft.com/office/drawing/2010/main">
-        <mc:Choice Requires="a14">
+      <mc:AlternateContent xmlns:mc="http://schemas.openxmlformats.org/markup-compatibility/2006">
+        <mc:Choice xmlns:a14="http://schemas.microsoft.com/office/drawing/2010/main" Requires="a14">
           <p:sp>
             <p:nvSpPr>
               <p:cNvPr id="5" name="TextBox 4">
@@ -17108,10 +17108,10 @@
                       </m:e>
                       <m:sub>
                         <m:r>
-                          <a:rPr lang="en-US" altLang="ko-KR" sz="1600" i="1">
+                          <a:rPr lang="en-US" altLang="ko-KR" sz="1600" b="0" i="1" smtClean="0">
                             <a:latin typeface="Cambria Math" panose="02040503050406030204" pitchFamily="18" charset="0"/>
                           </a:rPr>
-                          <m:t>𝐴</m:t>
+                          <m:t>𝑍</m:t>
                         </m:r>
                       </m:sub>
                     </m:sSub>
@@ -17392,7 +17392,7 @@
                               <a:rPr lang="en-US" altLang="ko-KR" sz="1600" b="0" i="1" smtClean="0">
                                 <a:latin typeface="Cambria Math" panose="02040503050406030204" pitchFamily="18" charset="0"/>
                               </a:rPr>
-                              <m:t>𝐴</m:t>
+                              <m:t>𝑍</m:t>
                             </m:r>
                           </m:sub>
                         </m:sSub>
@@ -17578,7 +17578,7 @@
             </p:txBody>
           </p:sp>
         </mc:Choice>
-        <mc:Fallback xmlns="">
+        <mc:Fallback>
           <p:sp>
             <p:nvSpPr>
               <p:cNvPr id="5" name="TextBox 4">
@@ -17781,8 +17781,8 @@
           </p:sp>
         </mc:Fallback>
       </mc:AlternateContent>
-      <mc:AlternateContent xmlns:mc="http://schemas.openxmlformats.org/markup-compatibility/2006" xmlns:a14="http://schemas.microsoft.com/office/drawing/2010/main">
-        <mc:Choice Requires="a14">
+      <mc:AlternateContent xmlns:mc="http://schemas.openxmlformats.org/markup-compatibility/2006">
+        <mc:Choice xmlns:a14="http://schemas.microsoft.com/office/drawing/2010/main" Requires="a14">
           <p:sp>
             <p:nvSpPr>
               <p:cNvPr id="10" name="TextBox 9">
@@ -17989,10 +17989,10 @@
                             </m:e>
                             <m:sub>
                               <m:r>
-                                <a:rPr lang="en-US" altLang="ko-KR" i="1">
+                                <a:rPr lang="en-US" altLang="ko-KR" b="0" i="1" smtClean="0">
                                   <a:latin typeface="Cambria Math" panose="02040503050406030204" pitchFamily="18" charset="0"/>
                                 </a:rPr>
-                                <m:t>𝐴</m:t>
+                                <m:t>𝑍</m:t>
                               </m:r>
                             </m:sub>
                           </m:sSub>
@@ -18041,7 +18041,7 @@
             </p:txBody>
           </p:sp>
         </mc:Choice>
-        <mc:Fallback xmlns="">
+        <mc:Fallback>
           <p:sp>
             <p:nvSpPr>
               <p:cNvPr id="10" name="TextBox 9">
